--- a/alumnos/soluciones/ej14_traducir_deck/ficheros/charla_taller_en.pptx
+++ b/alumnos/soluciones/ej14_traducir_deck/ficheros/charla_taller_en.pptx
@@ -3184,7 +3184,7 @@
           <a:lstStyle/>
           <a:p>
             <a:r>
-              <a:t>A program that receives a task in natural language</a:t>
+              <a:t>A program that receives a task given in natural language</a:t>
             </a:r>
           </a:p>
           <a:p>
@@ -3329,7 +3329,7 @@
           </a:p>
           <a:p>
             <a:r>
-              <a:t>You decide, the agent executes</a:t>
+              <a:t>You decide; the agent executes</a:t>
             </a:r>
           </a:p>
         </p:txBody>
